--- a/slides/datasets-in-10-minutes-swe-bench-verified.pptx
+++ b/slides/datasets-in-10-minutes-swe-bench-verified.pptx
@@ -7671,7 +7671,7 @@
         </p:nvSpPr>
         <p:spPr>
           <a:xfrm>
-            <a:off x="548640" y="1508760"/>
+            <a:off x="548640" y="1869056"/>
             <a:ext cx="8046720" cy="1063625"/>
           </a:xfrm>
           <a:prstGeom prst="rect">
@@ -7805,7 +7805,7 @@
         </p:nvSpPr>
         <p:spPr>
           <a:xfrm>
-            <a:off x="594360" y="2773553"/>
+            <a:off x="594360" y="3133849"/>
             <a:ext cx="7955279" cy="777240"/>
           </a:xfrm>
           <a:prstGeom prst="rect">
@@ -8064,7 +8064,7 @@
         </p:nvSpPr>
         <p:spPr>
           <a:xfrm>
-            <a:off x="548640" y="1508760"/>
+            <a:off x="548640" y="2326820"/>
             <a:ext cx="8046720" cy="484187"/>
           </a:xfrm>
           <a:prstGeom prst="rect">
@@ -8136,7 +8136,7 @@
         </p:nvSpPr>
         <p:spPr>
           <a:xfrm>
-            <a:off x="594360" y="2194115"/>
+            <a:off x="594360" y="3012175"/>
             <a:ext cx="7955279" cy="777240"/>
           </a:xfrm>
           <a:prstGeom prst="rect">
@@ -8281,7 +8281,7 @@
         </p:nvSpPr>
         <p:spPr>
           <a:xfrm>
-            <a:off x="594360" y="1307592"/>
+            <a:off x="594360" y="2125652"/>
             <a:ext cx="7955279" cy="164592"/>
           </a:xfrm>
           <a:prstGeom prst="rect">
@@ -8909,7 +8909,7 @@
         </p:nvSpPr>
         <p:spPr>
           <a:xfrm>
-            <a:off x="548640" y="1508760"/>
+            <a:off x="548640" y="2172020"/>
             <a:ext cx="8046720" cy="793750"/>
           </a:xfrm>
           <a:prstGeom prst="rect">
@@ -9012,7 +9012,7 @@
         </p:nvSpPr>
         <p:spPr>
           <a:xfrm>
-            <a:off x="594360" y="2503678"/>
+            <a:off x="594360" y="3166938"/>
             <a:ext cx="7955279" cy="777240"/>
           </a:xfrm>
           <a:prstGeom prst="rect">
@@ -9157,7 +9157,7 @@
         </p:nvSpPr>
         <p:spPr>
           <a:xfrm>
-            <a:off x="594360" y="1307592"/>
+            <a:off x="594360" y="1970852"/>
             <a:ext cx="7955279" cy="164592"/>
           </a:xfrm>
           <a:prstGeom prst="rect">
@@ -10049,7 +10049,7 @@
         </p:nvSpPr>
         <p:spPr>
           <a:xfrm>
-            <a:off x="548640" y="1508760"/>
+            <a:off x="548640" y="1843703"/>
             <a:ext cx="8046720" cy="1111250"/>
           </a:xfrm>
           <a:prstGeom prst="rect">
@@ -10183,7 +10183,7 @@
         </p:nvSpPr>
         <p:spPr>
           <a:xfrm>
-            <a:off x="594360" y="2821178"/>
+            <a:off x="594360" y="3156121"/>
             <a:ext cx="7955279" cy="777240"/>
           </a:xfrm>
           <a:prstGeom prst="rect">
@@ -20131,7 +20131,7 @@
         </p:nvSpPr>
         <p:spPr>
           <a:xfrm>
-            <a:off x="548640" y="1508760"/>
+            <a:off x="548640" y="2310380"/>
             <a:ext cx="8046720" cy="515937"/>
           </a:xfrm>
           <a:prstGeom prst="rect">
@@ -20203,7 +20203,7 @@
         </p:nvSpPr>
         <p:spPr>
           <a:xfrm>
-            <a:off x="594360" y="2225865"/>
+            <a:off x="594360" y="3027485"/>
             <a:ext cx="7955279" cy="777240"/>
           </a:xfrm>
           <a:prstGeom prst="rect">
@@ -20348,7 +20348,7 @@
         </p:nvSpPr>
         <p:spPr>
           <a:xfrm>
-            <a:off x="594360" y="1307592"/>
+            <a:off x="594360" y="2109212"/>
             <a:ext cx="7955279" cy="164592"/>
           </a:xfrm>
           <a:prstGeom prst="rect">
@@ -20516,7 +20516,7 @@
         </p:nvSpPr>
         <p:spPr>
           <a:xfrm>
-            <a:off x="548640" y="1508760"/>
+            <a:off x="548640" y="2187438"/>
             <a:ext cx="8046720" cy="762000"/>
           </a:xfrm>
           <a:prstGeom prst="rect">
@@ -20619,7 +20619,7 @@
         </p:nvSpPr>
         <p:spPr>
           <a:xfrm>
-            <a:off x="594360" y="2471928"/>
+            <a:off x="594360" y="3150606"/>
             <a:ext cx="7955279" cy="777240"/>
           </a:xfrm>
           <a:prstGeom prst="rect">
@@ -20764,7 +20764,7 @@
         </p:nvSpPr>
         <p:spPr>
           <a:xfrm>
-            <a:off x="594360" y="1307592"/>
+            <a:off x="594360" y="1986270"/>
             <a:ext cx="7955279" cy="164592"/>
           </a:xfrm>
           <a:prstGeom prst="rect">
@@ -21046,7 +21046,7 @@
         </p:nvSpPr>
         <p:spPr>
           <a:xfrm>
-            <a:off x="548640" y="1508760"/>
+            <a:off x="548640" y="2155580"/>
             <a:ext cx="8046720" cy="825500"/>
           </a:xfrm>
           <a:prstGeom prst="rect">
@@ -21149,7 +21149,7 @@
         </p:nvSpPr>
         <p:spPr>
           <a:xfrm>
-            <a:off x="594360" y="2535428"/>
+            <a:off x="594360" y="3182248"/>
             <a:ext cx="7955279" cy="777240"/>
           </a:xfrm>
           <a:prstGeom prst="rect">
@@ -21294,7 +21294,7 @@
         </p:nvSpPr>
         <p:spPr>
           <a:xfrm>
-            <a:off x="594360" y="1307592"/>
+            <a:off x="594360" y="1954412"/>
             <a:ext cx="7955279" cy="164592"/>
           </a:xfrm>
           <a:prstGeom prst="rect">
@@ -21462,7 +21462,7 @@
         </p:nvSpPr>
         <p:spPr>
           <a:xfrm>
-            <a:off x="548640" y="1508760"/>
+            <a:off x="548640" y="1917442"/>
             <a:ext cx="8046720" cy="1301750"/>
           </a:xfrm>
           <a:prstGeom prst="rect">
@@ -21627,7 +21627,7 @@
         </p:nvSpPr>
         <p:spPr>
           <a:xfrm>
-            <a:off x="594360" y="3011678"/>
+            <a:off x="594360" y="3420360"/>
             <a:ext cx="7955279" cy="777240"/>
           </a:xfrm>
           <a:prstGeom prst="rect">
@@ -21772,7 +21772,7 @@
         </p:nvSpPr>
         <p:spPr>
           <a:xfrm>
-            <a:off x="594360" y="1307592"/>
+            <a:off x="594360" y="1716274"/>
             <a:ext cx="7955279" cy="164592"/>
           </a:xfrm>
           <a:prstGeom prst="rect">
@@ -21940,7 +21940,7 @@
         </p:nvSpPr>
         <p:spPr>
           <a:xfrm>
-            <a:off x="548640" y="1508760"/>
+            <a:off x="548640" y="2172020"/>
             <a:ext cx="8046720" cy="793750"/>
           </a:xfrm>
           <a:prstGeom prst="rect">
@@ -22043,7 +22043,7 @@
         </p:nvSpPr>
         <p:spPr>
           <a:xfrm>
-            <a:off x="594360" y="2503678"/>
+            <a:off x="594360" y="3166938"/>
             <a:ext cx="7955279" cy="777240"/>
           </a:xfrm>
           <a:prstGeom prst="rect">
@@ -22188,7 +22188,7 @@
         </p:nvSpPr>
         <p:spPr>
           <a:xfrm>
-            <a:off x="594360" y="1307592"/>
+            <a:off x="594360" y="1970852"/>
             <a:ext cx="7955279" cy="164592"/>
           </a:xfrm>
           <a:prstGeom prst="rect">
@@ -22356,7 +22356,7 @@
         </p:nvSpPr>
         <p:spPr>
           <a:xfrm>
-            <a:off x="548640" y="1508760"/>
+            <a:off x="548640" y="2326217"/>
             <a:ext cx="8046720" cy="484187"/>
           </a:xfrm>
           <a:prstGeom prst="rect">
@@ -22428,7 +22428,7 @@
         </p:nvSpPr>
         <p:spPr>
           <a:xfrm>
-            <a:off x="594360" y="2194115"/>
+            <a:off x="594360" y="3011572"/>
             <a:ext cx="7955279" cy="777240"/>
           </a:xfrm>
           <a:prstGeom prst="rect">
@@ -22573,7 +22573,7 @@
         </p:nvSpPr>
         <p:spPr>
           <a:xfrm>
-            <a:off x="594360" y="1307592"/>
+            <a:off x="594360" y="2125049"/>
             <a:ext cx="7955279" cy="164592"/>
           </a:xfrm>
           <a:prstGeom prst="rect">
@@ -22741,7 +22741,7 @@
         </p:nvSpPr>
         <p:spPr>
           <a:xfrm>
-            <a:off x="548640" y="1508760"/>
+            <a:off x="548640" y="2155580"/>
             <a:ext cx="8046720" cy="825500"/>
           </a:xfrm>
           <a:prstGeom prst="rect">
@@ -22844,7 +22844,7 @@
         </p:nvSpPr>
         <p:spPr>
           <a:xfrm>
-            <a:off x="594360" y="2535428"/>
+            <a:off x="594360" y="3182248"/>
             <a:ext cx="7955279" cy="777240"/>
           </a:xfrm>
           <a:prstGeom prst="rect">
@@ -22989,7 +22989,7 @@
         </p:nvSpPr>
         <p:spPr>
           <a:xfrm>
-            <a:off x="594360" y="1307592"/>
+            <a:off x="594360" y="1954412"/>
             <a:ext cx="7955279" cy="164592"/>
           </a:xfrm>
           <a:prstGeom prst="rect">
@@ -23157,7 +23157,7 @@
         </p:nvSpPr>
         <p:spPr>
           <a:xfrm>
-            <a:off x="548640" y="1508760"/>
+            <a:off x="548640" y="2227646"/>
             <a:ext cx="8046720" cy="682625"/>
           </a:xfrm>
           <a:prstGeom prst="rect">
@@ -23260,7 +23260,7 @@
         </p:nvSpPr>
         <p:spPr>
           <a:xfrm>
-            <a:off x="594360" y="2392553"/>
+            <a:off x="594360" y="3111439"/>
             <a:ext cx="7955279" cy="777240"/>
           </a:xfrm>
           <a:prstGeom prst="rect">
@@ -23405,7 +23405,7 @@
         </p:nvSpPr>
         <p:spPr>
           <a:xfrm>
-            <a:off x="594360" y="1307592"/>
+            <a:off x="594360" y="2026478"/>
             <a:ext cx="7955279" cy="164592"/>
           </a:xfrm>
           <a:prstGeom prst="rect">
@@ -23573,7 +23573,7 @@
         </p:nvSpPr>
         <p:spPr>
           <a:xfrm>
-            <a:off x="548640" y="1508760"/>
+            <a:off x="548640" y="2155580"/>
             <a:ext cx="8046720" cy="825500"/>
           </a:xfrm>
           <a:prstGeom prst="rect">
@@ -23676,7 +23676,7 @@
         </p:nvSpPr>
         <p:spPr>
           <a:xfrm>
-            <a:off x="594360" y="2535428"/>
+            <a:off x="594360" y="3182248"/>
             <a:ext cx="7955279" cy="777240"/>
           </a:xfrm>
           <a:prstGeom prst="rect">
@@ -23821,7 +23821,7 @@
         </p:nvSpPr>
         <p:spPr>
           <a:xfrm>
-            <a:off x="594360" y="1307592"/>
+            <a:off x="594360" y="1954412"/>
             <a:ext cx="7955279" cy="164592"/>
           </a:xfrm>
           <a:prstGeom prst="rect">
@@ -23989,7 +23989,7 @@
         </p:nvSpPr>
         <p:spPr>
           <a:xfrm>
-            <a:off x="548640" y="1508760"/>
+            <a:off x="548640" y="2172020"/>
             <a:ext cx="8046720" cy="793750"/>
           </a:xfrm>
           <a:prstGeom prst="rect">
@@ -24092,7 +24092,7 @@
         </p:nvSpPr>
         <p:spPr>
           <a:xfrm>
-            <a:off x="594360" y="2503678"/>
+            <a:off x="594360" y="3166938"/>
             <a:ext cx="7955279" cy="777240"/>
           </a:xfrm>
           <a:prstGeom prst="rect">
@@ -24237,7 +24237,7 @@
         </p:nvSpPr>
         <p:spPr>
           <a:xfrm>
-            <a:off x="594360" y="1307592"/>
+            <a:off x="594360" y="1970852"/>
             <a:ext cx="7955279" cy="164592"/>
           </a:xfrm>
           <a:prstGeom prst="rect">
@@ -35288,7 +35288,7 @@
         </p:nvSpPr>
         <p:spPr>
           <a:xfrm>
-            <a:off x="548640" y="1508760"/>
+            <a:off x="548640" y="2171417"/>
             <a:ext cx="8046720" cy="793750"/>
           </a:xfrm>
           <a:prstGeom prst="rect">
@@ -35391,7 +35391,7 @@
         </p:nvSpPr>
         <p:spPr>
           <a:xfrm>
-            <a:off x="594360" y="2503678"/>
+            <a:off x="594360" y="3166335"/>
             <a:ext cx="7955279" cy="777240"/>
           </a:xfrm>
           <a:prstGeom prst="rect">
@@ -35536,7 +35536,7 @@
         </p:nvSpPr>
         <p:spPr>
           <a:xfrm>
-            <a:off x="594360" y="1307592"/>
+            <a:off x="594360" y="1970249"/>
             <a:ext cx="7955279" cy="164592"/>
           </a:xfrm>
           <a:prstGeom prst="rect">

--- a/slides/datasets-in-10-minutes-swe-bench-verified.pptx
+++ b/slides/datasets-in-10-minutes-swe-bench-verified.pptx
@@ -12577,7 +12577,7 @@
                 <a:ea typeface="Noto Sans CJK JP"/>
                 <a:cs typeface="Noto Sans"/>
               </a:rPr>
-              <a:t>SWE-bench Verifiedの公式配布ページ</a:t>
+              <a:t>SWE-benchの公式サイト</a:t>
             </a:r>
           </a:p>
         </p:txBody>
@@ -12625,35 +12625,11 @@
                 <a:ea typeface="Noto Sans CJK JP"/>
                 <a:cs typeface="Noto Sans"/>
               </a:rPr>
-              <a:t>SWE-bench Verified: 公開データ</a:t>
+              <a:t>SWE-bench: 公式サイト</a:t>
             </a:r>
           </a:p>
         </p:txBody>
       </p:sp>
-      <p:pic>
-        <p:nvPicPr>
-          <p:cNvPr id="4" name="Picture 3" descr="dataset-page.png"/>
-          <p:cNvPicPr>
-            <a:picLocks noChangeAspect="1"/>
-          </p:cNvPicPr>
-          <p:nvPr/>
-        </p:nvPicPr>
-        <p:blipFill>
-          <a:blip r:embed="rId2"/>
-          <a:stretch>
-            <a:fillRect/>
-          </a:stretch>
-        </p:blipFill>
-        <p:spPr>
-          <a:xfrm>
-            <a:off x="2274570" y="1481328"/>
-            <a:ext cx="4594859" cy="3063240"/>
-          </a:xfrm>
-          <a:prstGeom prst="rect">
-            <a:avLst/>
-          </a:prstGeom>
-        </p:spPr>
-      </p:pic>
       <p:sp>
         <p:nvSpPr>
           <p:cNvPr id="5" name="TextBox 4"/>
@@ -12678,7 +12654,7 @@
           <a:p>
             <a:pPr algn="l">
               <a:lnSpc>
-                <a:spcPct val="112000"/>
+                <a:spcPct val="110000"/>
               </a:lnSpc>
               <a:spcBef>
                 <a:spcPts val="0"/>
@@ -12695,53 +12671,42 @@
               </a:defRPr>
             </a:pPr>
             <a:r>
-              <a:rPr sz="810" b="0" lang="ja-JP" altLang="en-US">
+              <a:rPr sz="1000">
                 <a:solidFill>
                   <a:srgbClr val="626669"/>
                 </a:solidFill>
                 <a:latin typeface="Noto Sans"/>
-                <a:ea typeface="Noto Sans CJK JP"/>
-                <a:cs typeface="Noto Sans"/>
-              </a:rPr>
-              <a:t/>
-            </a:r>
-            <a:r>
-              <a:rPr sz="810" b="0" lang="ja-JP" altLang="en-US">
-                <a:solidFill>
-                  <a:srgbClr val="626669"/>
-                </a:solidFill>
-                <a:latin typeface="Noto Sans"/>
-                <a:ea typeface="Noto Sans CJK JP"/>
-                <a:cs typeface="Noto Sans"/>
-              </a:rPr>
-              <a:t>SWE-bench team. SWE-bench Verified. Hugging Face公式配布ページ。2026-10-16参照。</a:t>
-            </a:r>
-            <a:r>
-              <a:rPr sz="810" b="0" lang="ja-JP" altLang="en-US">
-                <a:solidFill>
-                  <a:srgbClr val="626669"/>
-                </a:solidFill>
-                <a:latin typeface="Noto Sans"/>
-                <a:ea typeface="Noto Sans CJK JP"/>
-                <a:cs typeface="Noto Sans"/>
-              </a:rPr>
-              <a:t>  </a:t>
-            </a:r>
-            <a:r>
-              <a:rPr sz="810" b="0" lang="ja-JP" altLang="en-US">
-                <a:solidFill>
-                  <a:srgbClr val="626669"/>
-                </a:solidFill>
-                <a:latin typeface="Noto Sans"/>
-                <a:ea typeface="Noto Sans CJK JP"/>
-                <a:cs typeface="Noto Sans"/>
-                <a:hlinkClick r:id="rId3"/>
-              </a:rPr>
-              <a:t>https://huggingface.co/datasets/princeton-nlp/SWE-bench_Verified</a:t>
+                <a:hlinkClick r:id="rId5"/>
+              </a:rPr>
+              <a:t>https://www.swebench.com/</a:t>
             </a:r>
           </a:p>
         </p:txBody>
       </p:sp>
+      <p:pic>
+        <p:nvPicPr>
+          <p:cNvPr id="6" name="公式サイトの画面" descr="image.png"/>
+          <p:cNvPicPr>
+            <a:picLocks noChangeAspect="1"/>
+          </p:cNvPicPr>
+          <p:nvPr/>
+        </p:nvPicPr>
+        <p:blipFill>
+          <a:blip r:embed="rId4"/>
+          <a:stretch>
+            <a:fillRect/>
+          </a:stretch>
+        </p:blipFill>
+        <p:spPr>
+          <a:xfrm>
+            <a:off x="2274570" y="1481328"/>
+            <a:ext cx="4594858" cy="3063239"/>
+          </a:xfrm>
+          <a:prstGeom prst="rect">
+            <a:avLst/>
+          </a:prstGeom>
+        </p:spPr>
+      </p:pic>
     </p:spTree>
   </p:cSld>
   <p:clrMapOvr>
@@ -34859,7 +34824,7 @@
         </p:nvSpPr>
         <p:spPr>
           <a:xfrm>
-            <a:off x="594360" y="1417320"/>
+            <a:off x="594360" y="1679959"/>
             <a:ext cx="7955279" cy="201168"/>
           </a:xfrm>
           <a:prstGeom prst="rect">
@@ -34913,7 +34878,7 @@
         </p:nvSpPr>
         <p:spPr>
           <a:xfrm>
-            <a:off x="594360" y="1773936"/>
+            <a:off x="594360" y="1970324"/>
             <a:ext cx="7955279" cy="1508760"/>
           </a:xfrm>
           <a:prstGeom prst="rect">
@@ -35029,7 +34994,7 @@
         </p:nvSpPr>
         <p:spPr>
           <a:xfrm>
-            <a:off x="594360" y="3520440"/>
+            <a:off x="594360" y="3464655"/>
             <a:ext cx="7955279" cy="960120"/>
           </a:xfrm>
           <a:prstGeom prst="rect">

--- a/slides/datasets-in-10-minutes-swe-bench-verified.pptx
+++ b/slides/datasets-in-10-minutes-swe-bench-verified.pptx
@@ -7447,8 +7447,8 @@
                 <a:ea typeface="Noto Sans CJK JP"/>
                 <a:cs typeface="Noto Sans"/>
               </a:rPr>
-              <a:t>GitHubの不具合報告を読み、コードを修正する
-人が検証した500課題で評価するデータセット</a:t>
+              <a:t>GitHubの不具合報告を読み、コードを修正する能力を
+人間が検証した500課題で評価するデータセット</a:t>
             </a:r>
           </a:p>
         </p:txBody>
@@ -11503,23 +11503,23 @@
                 <a:spcPct val="110000"/>
               </a:lnSpc>
               <a:buNone/>
-              <a:defRPr sz="2800" b="0">
-                <a:solidFill>
-                  <a:srgbClr val="303437"/>
-                </a:solidFill>
-                <a:latin typeface="Noto Sans"/>
-              </a:defRPr>
-            </a:pPr>
-            <a:r>
-              <a:rPr sz="2800" b="1" lang="ja-JP" altLang="en-US">
-                <a:solidFill>
-                  <a:srgbClr val="303437"/>
-                </a:solidFill>
-                <a:latin typeface="Noto Sans"/>
-                <a:ea typeface="Noto Sans CJK JP"/>
-                <a:cs typeface="Noto Sans"/>
-              </a:rPr>
-              <a:t>解決率は、解決した課題数を全課題数で割る</a:t>
+              <a:defRPr sz="2500" b="0">
+                <a:solidFill>
+                  <a:srgbClr val="303437"/>
+                </a:solidFill>
+                <a:latin typeface="Noto Sans"/>
+              </a:defRPr>
+            </a:pPr>
+            <a:r>
+              <a:rPr sz="2500" b="1" lang="ja-JP" altLang="en-US">
+                <a:solidFill>
+                  <a:srgbClr val="303437"/>
+                </a:solidFill>
+                <a:latin typeface="Noto Sans"/>
+                <a:ea typeface="Noto Sans CJK JP"/>
+                <a:cs typeface="Noto Sans"/>
+              </a:rPr>
+              <a:t>解決率は、解決した課題数を全課題数で割って算出する</a:t>
             </a:r>
           </a:p>
         </p:txBody>
@@ -13315,7 +13315,7 @@
                 <a:ea typeface="Noto Sans CJK JP"/>
                 <a:cs typeface="Noto Sans"/>
               </a:rPr>
-              <a:t>マージ済みで、Issueを解決し、テストファイルも変更したPull Requestを候補にする。</a:t>
+              <a:t>マージ済みで、Issueを解決し、テストファイルも変更したPull Requestを候補とした。</a:t>
             </a:r>
           </a:p>
           <a:p>
@@ -15773,7 +15773,7 @@
                 <a:ea typeface="Noto Sans CJK JP"/>
                 <a:cs typeface="Noto Sans"/>
               </a:rPr>
-              <a:t>参照修正は1ファイルが429課題</a:t>
+              <a:t>参照パッチが1ファイルの課題は429件</a:t>
             </a:r>
           </a:p>
         </p:txBody>
@@ -18280,7 +18280,7 @@
                 <a:ea typeface="Noto Sans CJK JP"/>
                 <a:cs typeface="Noto Sans"/>
               </a:rPr>
-              <a:t>SWE-Bench Proは別の、長い作業を含む評価</a:t>
+              <a:t>SWE-Bench Proは長時間の作業を扱う別の評価</a:t>
             </a:r>
           </a:p>
         </p:txBody>
@@ -18894,23 +18894,23 @@
                 <a:spcPct val="110000"/>
               </a:lnSpc>
               <a:buNone/>
-              <a:defRPr sz="2800" b="0">
-                <a:solidFill>
-                  <a:srgbClr val="303437"/>
-                </a:solidFill>
-                <a:latin typeface="Noto Sans"/>
-              </a:defRPr>
-            </a:pPr>
-            <a:r>
-              <a:rPr sz="2800" b="1" lang="ja-JP" altLang="en-US">
-                <a:solidFill>
-                  <a:srgbClr val="303437"/>
-                </a:solidFill>
-                <a:latin typeface="Noto Sans"/>
-                <a:ea typeface="Noto Sans CJK JP"/>
-                <a:cs typeface="Noto Sans"/>
-              </a:rPr>
-              <a:t>候補パッチを渡し、テスト実行とレポートを得る</a:t>
+              <a:defRPr sz="2500" b="0">
+                <a:solidFill>
+                  <a:srgbClr val="303437"/>
+                </a:solidFill>
+                <a:latin typeface="Noto Sans"/>
+              </a:defRPr>
+            </a:pPr>
+            <a:r>
+              <a:rPr sz="2500" b="1" lang="ja-JP" altLang="en-US">
+                <a:solidFill>
+                  <a:srgbClr val="303437"/>
+                </a:solidFill>
+                <a:latin typeface="Noto Sans"/>
+                <a:ea typeface="Noto Sans CJK JP"/>
+                <a:cs typeface="Noto Sans"/>
+              </a:rPr>
+              <a:t>候補パッチを渡し、テストを実行してレポートを得る</a:t>
             </a:r>
           </a:p>
         </p:txBody>
@@ -19383,7 +19383,7 @@
                 <a:ea typeface="Noto Sans CJK JP"/>
                 <a:cs typeface="Noto Sans"/>
               </a:rPr>
-              <a:t>モデルはIssueとリポジトリからパッチを作り、不具合を直すテストと既存動作の維持を確認する。</a:t>
+              <a:t>モデルはIssueとリポジトリからパッチを作り、不具合の修正と既存動作の維持をテストで確認する。</a:t>
             </a:r>
           </a:p>
           <a:p>
@@ -22084,7 +22084,7 @@
                 <a:ea typeface="Noto Sans CJK JP"/>
                 <a:cs typeface="Noto Sans"/>
               </a:rPr>
-              <a:t>Seaborn：大きな数の凡例で倍率が表示されず、値が誤って読める。参照修正は、凡例でオフセットと科学表記を使わない設定にする。</a:t>
+              <a:t>Seaborn：大きな数の凡例で倍率が表示されず、値が誤って読み取られる。参照修正は、凡例でオフセットと科学表記を使わない設定にする。</a:t>
             </a:r>
           </a:p>
         </p:txBody>
@@ -28949,7 +28949,7 @@
                 <a:ea typeface="Noto Sans CJK JP"/>
                 <a:cs typeface="Noto Sans"/>
               </a:rPr>
-              <a:t>500件のproblem_statement.mdで前後の空白を除き、</a:t>
+              <a:t>500件のproblem_statement.mdから前後の空白を除き、</a:t>
             </a:r>
           </a:p>
           <a:p>
@@ -32214,7 +32214,7 @@
                 <a:ea typeface="Noto Sans CJK JP"/>
                 <a:cs typeface="Noto Sans"/>
               </a:rPr>
-              <a:t>実Issueの修正を評価にした研究者たち</a:t>
+              <a:t>実Issueの修正を評価対象にした研究者たち</a:t>
             </a:r>
           </a:p>
         </p:txBody>
@@ -32687,7 +32687,7 @@
                           <a:ea typeface="Noto Sans CJK JP"/>
                           <a:cs typeface="Noto Sans"/>
                         </a:rPr>
-                        <a:t>課題に含まれるもの</a:t>
+                        <a:t>内容</a:t>
                       </a:r>
                     </a:p>
                   </a:txBody>
